--- a/submission/LunaHorizon_Slides.pptx
+++ b/submission/LunaHorizon_Slides.pptx
@@ -789,7 +789,7 @@
           <a:lstStyle/>
           <a:p>
             <a:r>
-              <a:t>Left: a year across eight Artemis III regions, computed in about half a second. Right: the Window Finder tests a landing every 3 hours against a 6.5-day crewed stay that needs continuous sunlight. From November 2026, Malapert Massif works on 71 days of the next year; Nobile Rim 2 on only 5.</a:t>
+              <a:t>Left: a year across the nine Artemis III candidate regions, computed in well under a second. Right: the Window Finder tests a landing every 3 hours against a 6.25-day crewed stay that needs continuous sunlight. From November 2026, Malapert Massif works on 75 days of the next year; Nobile Rim 2 on only 5.</a:t>
             </a:r>
           </a:p>
         </p:txBody>
@@ -859,7 +859,7 @@
           <a:lstStyle/>
           <a:p>
             <a:r>
-              <a:t>With the Sun a degree or two above the horizon, even a gentle 2 to 3 degree slope nearby hides it from a panel near the ground. Lifting the array from 2 to 10 metres nearly doubles the Artemis III landing opportunities at Malapert Massif. For communications, a relay orbiter over the south pole opens landing windows at far-side Schrödinger basin, which never sees Earth directly. Both are one click in Settings.</a:t>
+              <a:t>With the Sun a degree or two above the horizon, even a gentle 2 to 3 degree slope nearby hides it from a panel near the ground. Lifting the array from 2 to 10 metres raises the Artemis III landing days at Malapert Massif from 75 to 129 in the next 12 months. For communications, a relay orbiter over the south pole opens landing windows at far-side Schrödinger basin, which never sees Earth directly. Both are one click in Settings.</a:t>
             </a:r>
           </a:p>
         </p:txBody>
